--- a/presentation/Furuta Pendulum.pptx
+++ b/presentation/Furuta Pendulum.pptx
@@ -19,9 +19,9 @@
     <p:sldId id="270" r:id="rId7"/>
     <p:sldId id="271" r:id="rId8"/>
     <p:sldId id="272" r:id="rId9"/>
-    <p:sldId id="268" r:id="rId10"/>
+    <p:sldId id="273" r:id="rId10"/>
     <p:sldId id="263" r:id="rId11"/>
-    <p:sldId id="264" r:id="rId12"/>
+    <p:sldId id="268" r:id="rId12"/>
   </p:sldIdLst>
   <p:sldSz cx="12192000" cy="6858000"/>
   <p:notesSz cx="6858000" cy="9144000"/>
@@ -236,7 +236,7 @@
           <a:p>
             <a:fld id="{F68ABEA4-9216-4FDF-AAE1-D8632908A8EC}" type="datetimeFigureOut">
               <a:rPr lang="de-CH" smtClean="0"/>
-              <a:t>25.05.2026</a:t>
+              <a:t>28.05.2026</a:t>
             </a:fld>
             <a:endParaRPr lang="de-CH"/>
           </a:p>
@@ -413,7 +413,7 @@
           <a:p>
             <a:fld id="{4B78A90D-FE7E-41AF-B03D-808D82937CB9}" type="datetimeFigureOut">
               <a:rPr lang="de-CH" smtClean="0"/>
-              <a:t>25.05.2026</a:t>
+              <a:t>28.05.2026</a:t>
             </a:fld>
             <a:endParaRPr lang="de-CH"/>
           </a:p>
@@ -1262,7 +1262,7 @@
           <a:p>
             <a:fld id="{9C26206A-A7FF-4A2F-A4EA-EDA7D9956B8C}" type="datetime1">
               <a:rPr lang="de-CH" noProof="0" smtClean="0"/>
-              <a:t>25.05.2026</a:t>
+              <a:t>28.05.2026</a:t>
             </a:fld>
             <a:endParaRPr lang="de-CH" noProof="0"/>
           </a:p>
@@ -1457,7 +1457,7 @@
           <a:p>
             <a:fld id="{AE2B7ECC-AD5B-4AE2-A84F-7ABFC0424E38}" type="datetime1">
               <a:rPr lang="de-CH" noProof="0" smtClean="0"/>
-              <a:t>25.05.2026</a:t>
+              <a:t>28.05.2026</a:t>
             </a:fld>
             <a:endParaRPr lang="de-CH" noProof="0"/>
           </a:p>
@@ -1744,7 +1744,7 @@
           <a:p>
             <a:fld id="{5FA21818-B1F9-4DD3-88F2-43FBC3C9BAF5}" type="datetime1">
               <a:rPr lang="de-CH" noProof="0" smtClean="0"/>
-              <a:t>25.05.2026</a:t>
+              <a:t>28.05.2026</a:t>
             </a:fld>
             <a:endParaRPr lang="de-CH" noProof="0"/>
           </a:p>
@@ -2042,7 +2042,7 @@
           <a:p>
             <a:fld id="{F570A20D-9FD8-4251-A734-1127FF21ADB2}" type="datetime1">
               <a:rPr lang="de-CH" noProof="0" smtClean="0"/>
-              <a:t>25.05.2026</a:t>
+              <a:t>28.05.2026</a:t>
             </a:fld>
             <a:endParaRPr lang="de-CH" noProof="0"/>
           </a:p>
@@ -2442,7 +2442,7 @@
           <a:p>
             <a:fld id="{BB5F4EA9-B322-4AC6-9ED4-333F1AAC8416}" type="datetime1">
               <a:rPr lang="de-CH" noProof="0" smtClean="0"/>
-              <a:t>25.05.2026</a:t>
+              <a:t>28.05.2026</a:t>
             </a:fld>
             <a:endParaRPr lang="de-CH" noProof="0"/>
           </a:p>
@@ -2810,7 +2810,7 @@
           <a:p>
             <a:fld id="{CFD59B2A-9722-4479-8974-FDB801910172}" type="datetime1">
               <a:rPr lang="de-CH" noProof="0" smtClean="0"/>
-              <a:t>25.05.2026</a:t>
+              <a:t>28.05.2026</a:t>
             </a:fld>
             <a:endParaRPr lang="de-CH" noProof="0"/>
           </a:p>
@@ -4839,7 +4839,7 @@
           <a:p>
             <a:fld id="{6861D6AC-3BAC-4A50-9479-1E7CD895A648}" type="datetime1">
               <a:rPr lang="de-CH" noProof="0" smtClean="0"/>
-              <a:t>25.05.2026</a:t>
+              <a:t>28.05.2026</a:t>
             </a:fld>
             <a:endParaRPr lang="de-CH" noProof="0"/>
           </a:p>
@@ -5087,7 +5087,7 @@
           <a:p>
             <a:fld id="{360162FC-E8FF-4D52-8F53-8F2A2A3AD348}" type="datetime1">
               <a:rPr lang="de-CH" noProof="0" smtClean="0"/>
-              <a:t>25.05.2026</a:t>
+              <a:t>28.05.2026</a:t>
             </a:fld>
             <a:endParaRPr lang="de-CH" noProof="0"/>
           </a:p>
@@ -5335,7 +5335,7 @@
           <a:p>
             <a:fld id="{56D5A3C0-7A2F-4A62-9057-882FB8F5659A}" type="datetime1">
               <a:rPr lang="de-CH" noProof="0" smtClean="0"/>
-              <a:t>25.05.2026</a:t>
+              <a:t>28.05.2026</a:t>
             </a:fld>
             <a:endParaRPr lang="de-CH" noProof="0"/>
           </a:p>
@@ -5611,7 +5611,7 @@
           <a:p>
             <a:fld id="{73923CAD-8964-4A8E-9E9C-0F755B932903}" type="datetime1">
               <a:rPr lang="de-CH" noProof="0" smtClean="0"/>
-              <a:t>25.05.2026</a:t>
+              <a:t>28.05.2026</a:t>
             </a:fld>
             <a:endParaRPr lang="de-CH" noProof="0"/>
           </a:p>
@@ -7542,7 +7542,7 @@
           <a:p>
             <a:fld id="{269E37AB-EE9C-4565-B2FD-B1FC504BEE2A}" type="datetime1">
               <a:rPr lang="de-CH" noProof="0" smtClean="0"/>
-              <a:t>25.05.2026</a:t>
+              <a:t>28.05.2026</a:t>
             </a:fld>
             <a:endParaRPr lang="de-CH" noProof="0"/>
           </a:p>
@@ -8002,31 +8002,41 @@
           <a:chExt cx="0" cy="0"/>
         </a:xfrm>
       </p:grpSpPr>
-      <p:sp>
-        <p:nvSpPr>
-          <p:cNvPr id="2" name="Bildplatzhalter 1">
-            <a:extLst>
-              <a:ext uri="{FF2B5EF4-FFF2-40B4-BE49-F238E27FC236}">
-                <a16:creationId xmlns:a16="http://schemas.microsoft.com/office/drawing/2014/main" id="{A715EF66-10D3-5190-0ABE-13DF42A23C81}"/>
-              </a:ext>
-            </a:extLst>
-          </p:cNvPr>
-          <p:cNvSpPr>
-            <a:spLocks noGrp="1"/>
-          </p:cNvSpPr>
+      <p:pic>
+        <p:nvPicPr>
+          <p:cNvPr id="8" name="Bildplatzhalter 7">
+            <a:extLst>
+              <a:ext uri="{FF2B5EF4-FFF2-40B4-BE49-F238E27FC236}">
+                <a16:creationId xmlns:a16="http://schemas.microsoft.com/office/drawing/2014/main" id="{6CF65F36-1341-0881-6CF8-DFCC783B1BA4}"/>
+              </a:ext>
+            </a:extLst>
+          </p:cNvPr>
+          <p:cNvPicPr>
+            <a:picLocks noGrp="1" noChangeAspect="1"/>
+          </p:cNvPicPr>
           <p:nvPr>
             <p:ph type="pic" sz="quarter" idx="11"/>
           </p:nvPr>
-        </p:nvSpPr>
-        <p:spPr/>
-        <p:txBody>
-          <a:bodyPr/>
-          <a:lstStyle/>
-          <a:p>
-            <a:endParaRPr lang="en-GB" noProof="0" dirty="0"/>
-          </a:p>
-        </p:txBody>
-      </p:sp>
+        </p:nvPicPr>
+        <p:blipFill>
+          <a:blip r:embed="rId2">
+            <a:extLst>
+              <a:ext uri="{28A0092B-C50C-407E-A947-70E740481C1C}">
+                <a14:useLocalDpi xmlns:a14="http://schemas.microsoft.com/office/drawing/2010/main" val="0"/>
+              </a:ext>
+            </a:extLst>
+          </a:blip>
+          <a:srcRect t="6428" b="6428"/>
+          <a:stretch>
+            <a:fillRect/>
+          </a:stretch>
+        </p:blipFill>
+        <p:spPr>
+          <a:prstGeom prst="rect">
+            <a:avLst/>
+          </a:prstGeom>
+        </p:spPr>
+      </p:pic>
       <p:sp>
         <p:nvSpPr>
           <p:cNvPr id="3" name="Titel 2">
@@ -8200,7 +8210,7 @@
           <a:p>
             <a:r>
               <a:rPr lang="en-GB" noProof="0" dirty="0"/>
-              <a:t>Outlook</a:t>
+              <a:t>5. Conclusion and Outlook</a:t>
             </a:r>
           </a:p>
         </p:txBody>
@@ -8228,13 +8238,32 @@
           <a:p>
             <a:r>
               <a:rPr lang="en-GB" noProof="0" dirty="0"/>
-              <a:t>Install cables such that full rotations of the motor are possible.</a:t>
+              <a:t>The project offered an interesting and manifold challenge.</a:t>
+            </a:r>
+          </a:p>
+          <a:p>
+            <a:r>
+              <a:rPr lang="en-GB" dirty="0"/>
+              <a:t>It included not only coding, but also engineering tasks.</a:t>
             </a:r>
           </a:p>
           <a:p>
             <a:r>
               <a:rPr lang="en-GB" noProof="0" dirty="0"/>
-              <a:t>Start and swing up by the pendulum itself (instead of starting already at zero-angle).</a:t>
+              <a:t>Many things had to be tested and determined empirically (such as constants from PID loop).</a:t>
+            </a:r>
+          </a:p>
+          <a:p>
+            <a:r>
+              <a:rPr lang="en-GB" dirty="0"/>
+              <a:t>We learned many things.</a:t>
+            </a:r>
+            <a:endParaRPr lang="en-GB" noProof="0" dirty="0"/>
+          </a:p>
+          <a:p>
+            <a:r>
+              <a:rPr lang="en-GB" noProof="0" dirty="0"/>
+              <a:t>We could still install the cables such that full rotations of the motor are possible.</a:t>
             </a:r>
           </a:p>
         </p:txBody>
@@ -8262,7 +8291,7 @@
           <a:p>
             <a:fld id="{9C28B327-839C-4A2D-B2E8-7E49B2F41E4B}" type="datetime1">
               <a:rPr lang="en-GB" noProof="0" smtClean="0"/>
-              <a:t>25.05.2026</a:t>
+              <a:t>28/05/2026</a:t>
             </a:fld>
             <a:endParaRPr lang="en-GB" noProof="0" dirty="0"/>
           </a:p>
@@ -8315,13 +8344,7 @@
   <p:cSld>
     <p:spTree>
       <p:nvGrpSpPr>
-        <p:cNvPr id="1" name="">
-          <a:extLst>
-            <a:ext uri="{FF2B5EF4-FFF2-40B4-BE49-F238E27FC236}">
-              <a16:creationId xmlns:a16="http://schemas.microsoft.com/office/drawing/2014/main" id="{D8B42567-C51F-AA18-7A96-FBB41C852F1B}"/>
-            </a:ext>
-          </a:extLst>
-        </p:cNvPr>
+        <p:cNvPr id="1" name=""/>
         <p:cNvGrpSpPr/>
         <p:nvPr/>
       </p:nvGrpSpPr>
@@ -8338,7 +8361,7 @@
           <p:cNvPr id="2" name="Titel 1">
             <a:extLst>
               <a:ext uri="{FF2B5EF4-FFF2-40B4-BE49-F238E27FC236}">
-                <a16:creationId xmlns:a16="http://schemas.microsoft.com/office/drawing/2014/main" id="{28071B3E-8BB2-4BD9-980A-F0131BB82969}"/>
+                <a16:creationId xmlns:a16="http://schemas.microsoft.com/office/drawing/2014/main" id="{27CEE016-24CD-6158-0C42-3FBDA4AE9976}"/>
               </a:ext>
             </a:extLst>
           </p:cNvPr>
@@ -8356,38 +8379,62 @@
           <a:p>
             <a:r>
               <a:rPr lang="en-GB" noProof="0" dirty="0"/>
-              <a:t>Hier </a:t>
-            </a:r>
-            <a:r>
-              <a:rPr lang="en-GB" noProof="0" dirty="0" err="1"/>
-              <a:t>steht</a:t>
-            </a:r>
-            <a:r>
-              <a:rPr lang="en-GB" noProof="0" dirty="0"/>
-              <a:t> der </a:t>
-            </a:r>
-            <a:r>
-              <a:rPr lang="en-GB" noProof="0" dirty="0" err="1"/>
-              <a:t>Folientitel</a:t>
-            </a:r>
-            <a:endParaRPr lang="en-GB" noProof="0" dirty="0"/>
-          </a:p>
-        </p:txBody>
-      </p:sp>
-      <p:sp>
-        <p:nvSpPr>
-          <p:cNvPr id="3" name="Inhaltsplatzhalter 2">
-            <a:extLst>
-              <a:ext uri="{FF2B5EF4-FFF2-40B4-BE49-F238E27FC236}">
-                <a16:creationId xmlns:a16="http://schemas.microsoft.com/office/drawing/2014/main" id="{D15657F9-1244-3A63-E5A0-4B8E29C970D8}"/>
-              </a:ext>
-            </a:extLst>
-          </p:cNvPr>
-          <p:cNvSpPr>
-            <a:spLocks noGrp="1"/>
-          </p:cNvSpPr>
+              <a:t>Demonstration from YouTube</a:t>
+            </a:r>
+          </a:p>
+        </p:txBody>
+      </p:sp>
+      <p:pic>
+        <p:nvPicPr>
+          <p:cNvPr id="7" name="Onlinemedien 6">
+            <a:hlinkClick r:id="" action="ppaction://media"/>
+            <a:extLst>
+              <a:ext uri="{FF2B5EF4-FFF2-40B4-BE49-F238E27FC236}">
+                <a16:creationId xmlns:a16="http://schemas.microsoft.com/office/drawing/2014/main" id="{C1D67418-755B-127C-7728-1F23DF167BAA}"/>
+              </a:ext>
+              <a:ext uri="{C183D7F6-B498-43B3-948B-1728B52AA6E4}">
+                <adec:decorative xmlns:adec="http://schemas.microsoft.com/office/drawing/2017/decorative" val="1"/>
+              </a:ext>
+            </a:extLst>
+          </p:cNvPr>
+          <p:cNvPicPr>
+            <a:picLocks noGrp="1" noRot="1" noChangeAspect="1"/>
+          </p:cNvPicPr>
           <p:nvPr>
             <p:ph idx="1"/>
+            <a:videoFile r:link="rId1"/>
+          </p:nvPr>
+        </p:nvPicPr>
+        <p:blipFill>
+          <a:blip r:embed="rId3"/>
+          <a:stretch>
+            <a:fillRect/>
+          </a:stretch>
+        </p:blipFill>
+        <p:spPr>
+          <a:xfrm>
+            <a:off x="1954213" y="1162715"/>
+            <a:ext cx="8283575" cy="4679950"/>
+          </a:xfrm>
+          <a:prstGeom prst="rect">
+            <a:avLst/>
+          </a:prstGeom>
+        </p:spPr>
+      </p:pic>
+      <p:sp>
+        <p:nvSpPr>
+          <p:cNvPr id="4" name="Datumsplatzhalter 3">
+            <a:extLst>
+              <a:ext uri="{FF2B5EF4-FFF2-40B4-BE49-F238E27FC236}">
+                <a16:creationId xmlns:a16="http://schemas.microsoft.com/office/drawing/2014/main" id="{9C3C7FC3-C8E8-6611-DB61-491E8E769643}"/>
+              </a:ext>
+            </a:extLst>
+          </p:cNvPr>
+          <p:cNvSpPr>
+            <a:spLocks noGrp="1"/>
+          </p:cNvSpPr>
+          <p:nvPr>
+            <p:ph type="dt" sz="half" idx="10"/>
           </p:nvPr>
         </p:nvSpPr>
         <p:spPr/>
@@ -8395,113 +8442,9 @@
           <a:bodyPr/>
           <a:lstStyle/>
           <a:p>
-            <a:r>
-              <a:rPr lang="en-GB" noProof="0" dirty="0" err="1"/>
-              <a:t>Textplatzhalter</a:t>
-            </a:r>
-            <a:r>
-              <a:rPr lang="en-GB" noProof="0" dirty="0"/>
-              <a:t> </a:t>
-            </a:r>
-            <a:r>
-              <a:rPr lang="en-GB" noProof="0" dirty="0" err="1"/>
-              <a:t>haben</a:t>
-            </a:r>
-            <a:r>
-              <a:rPr lang="en-GB" noProof="0" dirty="0"/>
-              <a:t> </a:t>
-            </a:r>
-            <a:r>
-              <a:rPr lang="en-GB" noProof="0" dirty="0" err="1"/>
-              <a:t>als</a:t>
-            </a:r>
-            <a:r>
-              <a:rPr lang="en-GB" noProof="0" dirty="0"/>
-              <a:t> Standard </a:t>
-            </a:r>
-            <a:r>
-              <a:rPr lang="en-GB" noProof="0" dirty="0" err="1"/>
-              <a:t>Bulletpoints</a:t>
-            </a:r>
-            <a:r>
-              <a:rPr lang="en-GB" noProof="0" dirty="0"/>
-              <a:t>. Um </a:t>
-            </a:r>
-            <a:r>
-              <a:rPr lang="en-GB" noProof="0" dirty="0" err="1"/>
-              <a:t>diese</a:t>
-            </a:r>
-            <a:r>
-              <a:rPr lang="en-GB" noProof="0" dirty="0"/>
-              <a:t> </a:t>
-            </a:r>
-            <a:r>
-              <a:rPr lang="en-GB" noProof="0" dirty="0" err="1"/>
-              <a:t>zu</a:t>
-            </a:r>
-            <a:r>
-              <a:rPr lang="en-GB" noProof="0" dirty="0"/>
-              <a:t> </a:t>
-            </a:r>
-            <a:r>
-              <a:rPr lang="en-GB" noProof="0" dirty="0" err="1"/>
-              <a:t>entfernen</a:t>
-            </a:r>
-            <a:r>
-              <a:rPr lang="en-GB" noProof="0" dirty="0"/>
-              <a:t> </a:t>
-            </a:r>
-            <a:r>
-              <a:rPr lang="en-GB" noProof="0" dirty="0" err="1"/>
-              <a:t>drücken</a:t>
-            </a:r>
-            <a:r>
-              <a:rPr lang="en-GB" noProof="0" dirty="0"/>
-              <a:t> Sie </a:t>
-            </a:r>
-            <a:r>
-              <a:rPr lang="en-GB" noProof="0" dirty="0" err="1"/>
-              <a:t>vor</a:t>
-            </a:r>
-            <a:r>
-              <a:rPr lang="en-GB" noProof="0" dirty="0"/>
-              <a:t> der </a:t>
-            </a:r>
-            <a:r>
-              <a:rPr lang="en-GB" noProof="0" dirty="0" err="1"/>
-              <a:t>Texteingabe</a:t>
-            </a:r>
-            <a:r>
-              <a:rPr lang="en-GB" noProof="0" dirty="0"/>
-              <a:t> die Backspace Taste.</a:t>
-            </a:r>
-          </a:p>
-        </p:txBody>
-      </p:sp>
-      <p:sp>
-        <p:nvSpPr>
-          <p:cNvPr id="4" name="Datumsplatzhalter 3">
-            <a:extLst>
-              <a:ext uri="{FF2B5EF4-FFF2-40B4-BE49-F238E27FC236}">
-                <a16:creationId xmlns:a16="http://schemas.microsoft.com/office/drawing/2014/main" id="{30857F1D-4C22-45A2-699B-504F928EE200}"/>
-              </a:ext>
-            </a:extLst>
-          </p:cNvPr>
-          <p:cNvSpPr>
-            <a:spLocks noGrp="1"/>
-          </p:cNvSpPr>
-          <p:nvPr>
-            <p:ph type="dt" sz="half" idx="10"/>
-          </p:nvPr>
-        </p:nvSpPr>
-        <p:spPr/>
-        <p:txBody>
-          <a:bodyPr/>
-          <a:lstStyle/>
-          <a:p>
-            <a:fld id="{9C28B327-839C-4A2D-B2E8-7E49B2F41E4B}" type="datetime1">
+            <a:fld id="{6861D6AC-3BAC-4A50-9479-1E7CD895A648}" type="datetime1">
               <a:rPr lang="en-GB" noProof="0" smtClean="0"/>
-              <a:t>25.05.2026</a:t>
+              <a:t>28/05/2026</a:t>
             </a:fld>
             <a:endParaRPr lang="en-GB" noProof="0" dirty="0"/>
           </a:p>
@@ -8512,7 +8455,7 @@
           <p:cNvPr id="6" name="Foliennummernplatzhalter 5">
             <a:extLst>
               <a:ext uri="{FF2B5EF4-FFF2-40B4-BE49-F238E27FC236}">
-                <a16:creationId xmlns:a16="http://schemas.microsoft.com/office/drawing/2014/main" id="{2CE52E05-8629-F709-CAE3-3D471DE2BDC8}"/>
+                <a16:creationId xmlns:a16="http://schemas.microsoft.com/office/drawing/2014/main" id="{4CF344AC-A05B-27B7-F466-3BB7C6053150}"/>
               </a:ext>
             </a:extLst>
           </p:cNvPr>
@@ -8536,16 +8479,186 @@
           </a:p>
         </p:txBody>
       </p:sp>
+      <p:sp>
+        <p:nvSpPr>
+          <p:cNvPr id="8" name="Textfeld 7">
+            <a:extLst>
+              <a:ext uri="{FF2B5EF4-FFF2-40B4-BE49-F238E27FC236}">
+                <a16:creationId xmlns:a16="http://schemas.microsoft.com/office/drawing/2014/main" id="{03105EE4-336F-BC74-5EEF-A672528549A2}"/>
+              </a:ext>
+            </a:extLst>
+          </p:cNvPr>
+          <p:cNvSpPr txBox="1"/>
+          <p:nvPr/>
+        </p:nvSpPr>
+        <p:spPr>
+          <a:xfrm>
+            <a:off x="1954212" y="5842665"/>
+            <a:ext cx="3104440" cy="369332"/>
+          </a:xfrm>
+          <a:prstGeom prst="rect">
+            <a:avLst/>
+          </a:prstGeom>
+          <a:noFill/>
+        </p:spPr>
+        <p:txBody>
+          <a:bodyPr wrap="none" rtlCol="0">
+            <a:spAutoFit/>
+          </a:bodyPr>
+          <a:lstStyle/>
+          <a:p>
+            <a:r>
+              <a:rPr lang="en-GB" noProof="0" dirty="0"/>
+              <a:t>Source: Ben Katz (YouTube)</a:t>
+            </a:r>
+          </a:p>
+        </p:txBody>
+      </p:sp>
     </p:spTree>
     <p:extLst>
       <p:ext uri="{BB962C8B-B14F-4D97-AF65-F5344CB8AC3E}">
-        <p14:creationId xmlns:p14="http://schemas.microsoft.com/office/powerpoint/2010/main" val="143387391"/>
+        <p14:creationId xmlns:p14="http://schemas.microsoft.com/office/powerpoint/2010/main" val="3548576058"/>
       </p:ext>
     </p:extLst>
   </p:cSld>
   <p:clrMapOvr>
     <a:masterClrMapping/>
   </p:clrMapOvr>
+  <p:timing>
+    <p:tnLst>
+      <p:par>
+        <p:cTn id="1" dur="indefinite" restart="never" nodeType="tmRoot">
+          <p:childTnLst>
+            <p:seq concurrent="1" nextAc="seek">
+              <p:cTn id="2" dur="indefinite" nodeType="mainSeq">
+                <p:childTnLst>
+                  <p:par>
+                    <p:cTn id="3" fill="hold">
+                      <p:stCondLst>
+                        <p:cond delay="indefinite"/>
+                      </p:stCondLst>
+                      <p:childTnLst>
+                        <p:par>
+                          <p:cTn id="4" fill="hold">
+                            <p:stCondLst>
+                              <p:cond delay="0"/>
+                            </p:stCondLst>
+                            <p:childTnLst>
+                              <p:par>
+                                <p:cTn id="5" presetID="1" presetClass="mediacall" presetSubtype="0" fill="hold" nodeType="clickEffect">
+                                  <p:stCondLst>
+                                    <p:cond delay="0"/>
+                                  </p:stCondLst>
+                                  <p:childTnLst>
+                                    <p:cmd type="call" cmd="playFrom(0.0)">
+                                      <p:cBhvr>
+                                        <p:cTn id="6" dur="1" fill="hold"/>
+                                        <p:tgtEl>
+                                          <p:spTgt spid="7"/>
+                                        </p:tgtEl>
+                                      </p:cBhvr>
+                                    </p:cmd>
+                                  </p:childTnLst>
+                                </p:cTn>
+                              </p:par>
+                            </p:childTnLst>
+                          </p:cTn>
+                        </p:par>
+                      </p:childTnLst>
+                    </p:cTn>
+                  </p:par>
+                </p:childTnLst>
+              </p:cTn>
+              <p:prevCondLst>
+                <p:cond evt="onPrev" delay="0">
+                  <p:tgtEl>
+                    <p:sldTgt/>
+                  </p:tgtEl>
+                </p:cond>
+              </p:prevCondLst>
+              <p:nextCondLst>
+                <p:cond evt="onNext" delay="0">
+                  <p:tgtEl>
+                    <p:sldTgt/>
+                  </p:tgtEl>
+                </p:cond>
+              </p:nextCondLst>
+            </p:seq>
+            <p:video>
+              <p:cMediaNode vol="80000">
+                <p:cTn id="7" fill="hold" display="0">
+                  <p:stCondLst>
+                    <p:cond delay="indefinite"/>
+                  </p:stCondLst>
+                </p:cTn>
+                <p:tgtEl>
+                  <p:spTgt spid="7"/>
+                </p:tgtEl>
+              </p:cMediaNode>
+            </p:video>
+            <p:seq concurrent="1" nextAc="seek">
+              <p:cTn id="8" restart="whenNotActive" fill="hold" evtFilter="cancelBubble" nodeType="interactiveSeq">
+                <p:stCondLst>
+                  <p:cond evt="onClick" delay="0">
+                    <p:tgtEl>
+                      <p:spTgt spid="7"/>
+                    </p:tgtEl>
+                  </p:cond>
+                </p:stCondLst>
+                <p:endSync evt="end" delay="0">
+                  <p:rtn val="all"/>
+                </p:endSync>
+                <p:childTnLst>
+                  <p:par>
+                    <p:cTn id="9" fill="hold">
+                      <p:stCondLst>
+                        <p:cond delay="0"/>
+                      </p:stCondLst>
+                      <p:childTnLst>
+                        <p:par>
+                          <p:cTn id="10" fill="hold">
+                            <p:stCondLst>
+                              <p:cond delay="0"/>
+                            </p:stCondLst>
+                            <p:childTnLst>
+                              <p:par>
+                                <p:cTn id="11" presetID="2" presetClass="mediacall" presetSubtype="0" fill="hold" nodeType="clickEffect">
+                                  <p:stCondLst>
+                                    <p:cond delay="0"/>
+                                  </p:stCondLst>
+                                  <p:childTnLst>
+                                    <p:cmd type="call" cmd="togglePause">
+                                      <p:cBhvr>
+                                        <p:cTn id="12" dur="1" fill="hold"/>
+                                        <p:tgtEl>
+                                          <p:spTgt spid="7"/>
+                                        </p:tgtEl>
+                                      </p:cBhvr>
+                                    </p:cmd>
+                                  </p:childTnLst>
+                                </p:cTn>
+                              </p:par>
+                            </p:childTnLst>
+                          </p:cTn>
+                        </p:par>
+                      </p:childTnLst>
+                    </p:cTn>
+                  </p:par>
+                </p:childTnLst>
+              </p:cTn>
+              <p:nextCondLst>
+                <p:cond evt="onClick" delay="0">
+                  <p:tgtEl>
+                    <p:spTgt spid="7"/>
+                  </p:tgtEl>
+                </p:cond>
+              </p:nextCondLst>
+            </p:seq>
+          </p:childTnLst>
+        </p:cTn>
+      </p:par>
+    </p:tnLst>
+  </p:timing>
 </p:sld>
 </file>
 
@@ -8635,12 +8748,6 @@
           <a:p>
             <a:r>
               <a:rPr lang="en-GB" noProof="0" dirty="0"/>
-              <a:t>APB Bus (only mention, from exercises)</a:t>
-            </a:r>
-          </a:p>
-          <a:p>
-            <a:r>
-              <a:rPr lang="en-GB" noProof="0" dirty="0"/>
               <a:t>Drive Motor</a:t>
             </a:r>
           </a:p>
@@ -8675,7 +8782,7 @@
           <a:p>
             <a:fld id="{298B387B-FBD3-42F8-9E31-B45335F65718}" type="datetime1">
               <a:rPr lang="en-GB" noProof="0" smtClean="0"/>
-              <a:t>25.05.2026</a:t>
+              <a:t>28/05/2026</a:t>
             </a:fld>
             <a:endParaRPr lang="en-GB" noProof="0" dirty="0"/>
           </a:p>
@@ -8863,6 +8970,20 @@
               <a:t>PID Loop</a:t>
             </a:r>
           </a:p>
+          <a:p>
+            <a:pPr lvl="1"/>
+            <a:r>
+              <a:rPr lang="en-GB" dirty="0"/>
+              <a:t>Driver</a:t>
+            </a:r>
+          </a:p>
+          <a:p>
+            <a:pPr lvl="1"/>
+            <a:r>
+              <a:rPr lang="en-GB" noProof="0" dirty="0"/>
+              <a:t>APB Bus (from exercises)</a:t>
+            </a:r>
+          </a:p>
         </p:txBody>
       </p:sp>
       <p:sp>
@@ -8888,7 +9009,7 @@
           <a:p>
             <a:fld id="{360162FC-E8FF-4D52-8F53-8F2A2A3AD348}" type="datetime1">
               <a:rPr lang="en-GB" noProof="0" smtClean="0"/>
-              <a:t>25.05.2026</a:t>
+              <a:t>28/05/2026</a:t>
             </a:fld>
             <a:endParaRPr lang="en-GB" noProof="0" dirty="0"/>
           </a:p>
@@ -9004,7 +9125,7 @@
           <a:p>
             <a:fld id="{9C26206A-A7FF-4A2F-A4EA-EDA7D9956B8C}" type="datetime1">
               <a:rPr lang="en-GB" noProof="0" smtClean="0"/>
-              <a:t>25.05.2026</a:t>
+              <a:t>28/05/2026</a:t>
             </a:fld>
             <a:endParaRPr lang="en-GB" noProof="0" dirty="0"/>
           </a:p>
@@ -9255,7 +9376,7 @@
           <a:p>
             <a:fld id="{360162FC-E8FF-4D52-8F53-8F2A2A3AD348}" type="datetime1">
               <a:rPr lang="en-GB" noProof="0" smtClean="0"/>
-              <a:t>25.05.2026</a:t>
+              <a:t>28/05/2026</a:t>
             </a:fld>
             <a:endParaRPr lang="en-GB" noProof="0" dirty="0"/>
           </a:p>
@@ -9371,7 +9492,7 @@
           <a:p>
             <a:fld id="{360162FC-E8FF-4D52-8F53-8F2A2A3AD348}" type="datetime1">
               <a:rPr lang="en-GB" noProof="0" smtClean="0"/>
-              <a:t>25.05.2026</a:t>
+              <a:t>28/05/2026</a:t>
             </a:fld>
             <a:endParaRPr lang="en-GB" noProof="0" dirty="0"/>
           </a:p>
@@ -9500,8 +9621,8 @@
           </a:p>
         </p:txBody>
       </p:sp>
-      <mc:AlternateContent xmlns:mc="http://schemas.openxmlformats.org/markup-compatibility/2006">
-        <mc:Choice xmlns:a14="http://schemas.microsoft.com/office/drawing/2010/main" Requires="a14">
+      <mc:AlternateContent xmlns:mc="http://schemas.openxmlformats.org/markup-compatibility/2006" xmlns:a14="http://schemas.microsoft.com/office/drawing/2010/main">
+        <mc:Choice Requires="a14">
           <p:sp>
             <p:nvSpPr>
               <p:cNvPr id="3" name="Inhaltsplatzhalter 2">
@@ -9858,7 +9979,7 @@
             </p:txBody>
           </p:sp>
         </mc:Choice>
-        <mc:Fallback>
+        <mc:Fallback xmlns="">
           <p:sp>
             <p:nvSpPr>
               <p:cNvPr id="3" name="Inhaltsplatzhalter 2">
@@ -9921,7 +10042,7 @@
           <a:p>
             <a:fld id="{360162FC-E8FF-4D52-8F53-8F2A2A3AD348}" type="datetime1">
               <a:rPr lang="en-GB" noProof="0" smtClean="0"/>
-              <a:t>25.05.2026</a:t>
+              <a:t>28/05/2026</a:t>
             </a:fld>
             <a:endParaRPr lang="en-GB" noProof="0" dirty="0"/>
           </a:p>
@@ -10125,23 +10246,23 @@
             </a:r>
             <a:r>
               <a:rPr lang="de-CH" dirty="0"/>
-              <a:t> (</a:t>
+              <a:t> </a:t>
             </a:r>
             <a:r>
               <a:rPr lang="de-CH" dirty="0" err="1"/>
-              <a:t>direction</a:t>
+              <a:t>from</a:t>
             </a:r>
             <a:r>
               <a:rPr lang="de-CH" dirty="0"/>
-              <a:t>, </a:t>
+              <a:t> </a:t>
             </a:r>
             <a:r>
               <a:rPr lang="de-CH" dirty="0" err="1"/>
-              <a:t>steps</a:t>
+              <a:t>the</a:t>
             </a:r>
             <a:r>
               <a:rPr lang="de-CH" dirty="0"/>
-              <a:t>) </a:t>
+              <a:t> FPGA </a:t>
             </a:r>
             <a:r>
               <a:rPr lang="de-CH" dirty="0" err="1"/>
@@ -10236,9 +10357,186 @@
               <a:t>motor</a:t>
             </a:r>
             <a:r>
-              <a:rPr lang="de-CH"/>
+              <a:rPr lang="de-CH" dirty="0"/>
               <a:t>.</a:t>
             </a:r>
+          </a:p>
+          <a:p>
+            <a:r>
+              <a:rPr lang="de-CH" dirty="0"/>
+              <a:t>The FPGA </a:t>
+            </a:r>
+            <a:r>
+              <a:rPr lang="de-CH" dirty="0" err="1"/>
+              <a:t>only</a:t>
+            </a:r>
+            <a:r>
+              <a:rPr lang="de-CH" dirty="0"/>
+              <a:t> </a:t>
+            </a:r>
+            <a:r>
+              <a:rPr lang="de-CH" dirty="0" err="1"/>
+              <a:t>needs</a:t>
+            </a:r>
+            <a:r>
+              <a:rPr lang="de-CH" dirty="0"/>
+              <a:t> </a:t>
+            </a:r>
+            <a:r>
+              <a:rPr lang="de-CH" dirty="0" err="1"/>
+              <a:t>to</a:t>
+            </a:r>
+            <a:r>
+              <a:rPr lang="de-CH" dirty="0"/>
+              <a:t> send </a:t>
+            </a:r>
+            <a:r>
+              <a:rPr lang="de-CH" dirty="0" err="1"/>
+              <a:t>two</a:t>
+            </a:r>
+            <a:r>
+              <a:rPr lang="de-CH" dirty="0"/>
+              <a:t> </a:t>
+            </a:r>
+            <a:r>
+              <a:rPr lang="de-CH" dirty="0" err="1"/>
+              <a:t>signals</a:t>
+            </a:r>
+            <a:r>
+              <a:rPr lang="de-CH" dirty="0"/>
+              <a:t>: STEP (</a:t>
+            </a:r>
+            <a:r>
+              <a:rPr lang="de-CH" dirty="0" err="1"/>
+              <a:t>one</a:t>
+            </a:r>
+            <a:r>
+              <a:rPr lang="de-CH" dirty="0"/>
+              <a:t> pulse = </a:t>
+            </a:r>
+            <a:r>
+              <a:rPr lang="de-CH" dirty="0" err="1"/>
+              <a:t>one</a:t>
+            </a:r>
+            <a:r>
+              <a:rPr lang="de-CH" dirty="0"/>
+              <a:t> </a:t>
+            </a:r>
+            <a:r>
+              <a:rPr lang="de-CH" dirty="0" err="1"/>
+              <a:t>step</a:t>
+            </a:r>
+            <a:r>
+              <a:rPr lang="de-CH" dirty="0"/>
+              <a:t>) and DIR (high: CCW, </a:t>
+            </a:r>
+            <a:r>
+              <a:rPr lang="de-CH" dirty="0" err="1"/>
+              <a:t>low</a:t>
+            </a:r>
+            <a:r>
+              <a:rPr lang="de-CH" dirty="0"/>
+              <a:t>: CW).</a:t>
+            </a:r>
+          </a:p>
+          <a:p>
+            <a:r>
+              <a:rPr lang="de-CH" dirty="0"/>
+              <a:t>Power </a:t>
+            </a:r>
+            <a:r>
+              <a:rPr lang="de-CH" dirty="0" err="1"/>
+              <a:t>supply</a:t>
+            </a:r>
+            <a:r>
+              <a:rPr lang="de-CH" dirty="0"/>
+              <a:t> </a:t>
+            </a:r>
+            <a:r>
+              <a:rPr lang="de-CH" dirty="0" err="1"/>
+              <a:t>of</a:t>
+            </a:r>
+            <a:r>
+              <a:rPr lang="de-CH" dirty="0"/>
+              <a:t> </a:t>
+            </a:r>
+            <a:r>
+              <a:rPr lang="de-CH" dirty="0" err="1"/>
+              <a:t>the</a:t>
+            </a:r>
+            <a:r>
+              <a:rPr lang="de-CH" dirty="0"/>
+              <a:t> </a:t>
+            </a:r>
+            <a:r>
+              <a:rPr lang="de-CH" dirty="0" err="1"/>
+              <a:t>motor</a:t>
+            </a:r>
+            <a:r>
+              <a:rPr lang="de-CH" dirty="0"/>
+              <a:t>:</a:t>
+            </a:r>
+          </a:p>
+          <a:p>
+            <a:pPr lvl="1"/>
+            <a:r>
+              <a:rPr lang="de-CH" dirty="0"/>
+              <a:t>Motor </a:t>
+            </a:r>
+            <a:r>
+              <a:rPr lang="de-CH" dirty="0" err="1"/>
+              <a:t>Voltage</a:t>
+            </a:r>
+            <a:r>
+              <a:rPr lang="de-CH" dirty="0"/>
+              <a:t>: 8 – 30 V DC,</a:t>
+            </a:r>
+          </a:p>
+          <a:p>
+            <a:pPr lvl="1"/>
+            <a:r>
+              <a:rPr lang="de-CH" dirty="0" err="1"/>
+              <a:t>Logic</a:t>
+            </a:r>
+            <a:r>
+              <a:rPr lang="de-CH" dirty="0"/>
+              <a:t> </a:t>
+            </a:r>
+            <a:r>
+              <a:rPr lang="de-CH" dirty="0" err="1"/>
+              <a:t>levels</a:t>
+            </a:r>
+            <a:r>
+              <a:rPr lang="de-CH" dirty="0"/>
+              <a:t>: 3.3 V </a:t>
+            </a:r>
+            <a:r>
+              <a:rPr lang="de-CH" dirty="0" err="1"/>
+              <a:t>or</a:t>
+            </a:r>
+            <a:r>
+              <a:rPr lang="de-CH" dirty="0"/>
+              <a:t> 5 V (</a:t>
+            </a:r>
+            <a:r>
+              <a:rPr lang="de-CH" dirty="0" err="1"/>
+              <a:t>jumper</a:t>
+            </a:r>
+            <a:r>
+              <a:rPr lang="de-CH" dirty="0"/>
+              <a:t> </a:t>
+            </a:r>
+            <a:r>
+              <a:rPr lang="de-CH" dirty="0" err="1"/>
+              <a:t>selectable</a:t>
+            </a:r>
+            <a:r>
+              <a:rPr lang="de-CH" dirty="0"/>
+              <a:t>)</a:t>
+            </a:r>
+          </a:p>
+          <a:p>
+            <a:endParaRPr lang="de-CH" dirty="0"/>
           </a:p>
         </p:txBody>
       </p:sp>
@@ -10265,38 +10563,9 @@
           <a:p>
             <a:fld id="{360162FC-E8FF-4D52-8F53-8F2A2A3AD348}" type="datetime1">
               <a:rPr lang="de-CH" noProof="0" smtClean="0"/>
-              <a:t>25.05.2026</a:t>
+              <a:t>28.05.2026</a:t>
             </a:fld>
             <a:endParaRPr lang="de-CH" noProof="0"/>
-          </a:p>
-        </p:txBody>
-      </p:sp>
-      <p:sp>
-        <p:nvSpPr>
-          <p:cNvPr id="5" name="Fußzeilenplatzhalter 4">
-            <a:extLst>
-              <a:ext uri="{FF2B5EF4-FFF2-40B4-BE49-F238E27FC236}">
-                <a16:creationId xmlns:a16="http://schemas.microsoft.com/office/drawing/2014/main" id="{432BCABD-3A50-1E07-6274-59E7974ED27E}"/>
-              </a:ext>
-            </a:extLst>
-          </p:cNvPr>
-          <p:cNvSpPr>
-            <a:spLocks noGrp="1"/>
-          </p:cNvSpPr>
-          <p:nvPr>
-            <p:ph type="ftr" sz="quarter" idx="11"/>
-          </p:nvPr>
-        </p:nvSpPr>
-        <p:spPr/>
-        <p:txBody>
-          <a:bodyPr/>
-          <a:lstStyle/>
-          <a:p>
-            <a:r>
-              <a:rPr lang="de-DE" noProof="0"/>
-              <a:t>Organisationseinheit verbal – STRENG VERTRAULICH</a:t>
-            </a:r>
-            <a:endParaRPr lang="de-CH" noProof="0" dirty="0"/>
           </a:p>
         </p:txBody>
       </p:sp>
@@ -10364,7 +10633,7 @@
           <p:cNvPr id="2" name="Titel 1">
             <a:extLst>
               <a:ext uri="{FF2B5EF4-FFF2-40B4-BE49-F238E27FC236}">
-                <a16:creationId xmlns:a16="http://schemas.microsoft.com/office/drawing/2014/main" id="{27CEE016-24CD-6158-0C42-3FBDA4AE9976}"/>
+                <a16:creationId xmlns:a16="http://schemas.microsoft.com/office/drawing/2014/main" id="{1423C457-F235-5EC0-22EA-4121F6555562}"/>
               </a:ext>
             </a:extLst>
           </p:cNvPr>
@@ -10381,287 +10650,116 @@
           <a:lstStyle/>
           <a:p>
             <a:r>
-              <a:rPr lang="en-GB" noProof="0" dirty="0"/>
-              <a:t>Demonstration from YouTube</a:t>
-            </a:r>
+              <a:rPr lang="de-CH" dirty="0"/>
+              <a:t>4. Driver Motor</a:t>
+            </a:r>
+          </a:p>
+        </p:txBody>
+      </p:sp>
+      <p:sp>
+        <p:nvSpPr>
+          <p:cNvPr id="4" name="Datumsplatzhalter 3">
+            <a:extLst>
+              <a:ext uri="{FF2B5EF4-FFF2-40B4-BE49-F238E27FC236}">
+                <a16:creationId xmlns:a16="http://schemas.microsoft.com/office/drawing/2014/main" id="{66DAADD2-9885-3B0A-B3B4-A01AC29A6505}"/>
+              </a:ext>
+            </a:extLst>
+          </p:cNvPr>
+          <p:cNvSpPr>
+            <a:spLocks noGrp="1"/>
+          </p:cNvSpPr>
+          <p:nvPr>
+            <p:ph type="dt" sz="half" idx="10"/>
+          </p:nvPr>
+        </p:nvSpPr>
+        <p:spPr/>
+        <p:txBody>
+          <a:bodyPr/>
+          <a:lstStyle/>
+          <a:p>
+            <a:fld id="{360162FC-E8FF-4D52-8F53-8F2A2A3AD348}" type="datetime1">
+              <a:rPr lang="de-CH" noProof="0" smtClean="0"/>
+              <a:t>28.05.2026</a:t>
+            </a:fld>
+            <a:endParaRPr lang="de-CH" noProof="0"/>
+          </a:p>
+        </p:txBody>
+      </p:sp>
+      <p:sp>
+        <p:nvSpPr>
+          <p:cNvPr id="6" name="Foliennummernplatzhalter 5">
+            <a:extLst>
+              <a:ext uri="{FF2B5EF4-FFF2-40B4-BE49-F238E27FC236}">
+                <a16:creationId xmlns:a16="http://schemas.microsoft.com/office/drawing/2014/main" id="{2ECB8CEC-3190-411E-1DC1-34DE85610B6D}"/>
+              </a:ext>
+            </a:extLst>
+          </p:cNvPr>
+          <p:cNvSpPr>
+            <a:spLocks noGrp="1"/>
+          </p:cNvSpPr>
+          <p:nvPr>
+            <p:ph type="sldNum" sz="quarter" idx="12"/>
+          </p:nvPr>
+        </p:nvSpPr>
+        <p:spPr/>
+        <p:txBody>
+          <a:bodyPr/>
+          <a:lstStyle/>
+          <a:p>
+            <a:fld id="{5ACA52AF-F19D-405C-AD5F-7D94B96A5CC3}" type="slidenum">
+              <a:rPr lang="de-CH" noProof="0" smtClean="0"/>
+              <a:t>9</a:t>
+            </a:fld>
+            <a:endParaRPr lang="de-CH" noProof="0"/>
           </a:p>
         </p:txBody>
       </p:sp>
       <p:pic>
         <p:nvPicPr>
-          <p:cNvPr id="7" name="Onlinemedien 6">
-            <a:hlinkClick r:id="" action="ppaction://media"/>
-            <a:extLst>
-              <a:ext uri="{FF2B5EF4-FFF2-40B4-BE49-F238E27FC236}">
-                <a16:creationId xmlns:a16="http://schemas.microsoft.com/office/drawing/2014/main" id="{C1D67418-755B-127C-7728-1F23DF167BAA}"/>
-              </a:ext>
-              <a:ext uri="{C183D7F6-B498-43B3-948B-1728B52AA6E4}">
-                <adec:decorative xmlns:adec="http://schemas.microsoft.com/office/drawing/2017/decorative" val="1"/>
+          <p:cNvPr id="8" name="Grafik 7">
+            <a:extLst>
+              <a:ext uri="{FF2B5EF4-FFF2-40B4-BE49-F238E27FC236}">
+                <a16:creationId xmlns:a16="http://schemas.microsoft.com/office/drawing/2014/main" id="{953C771E-0CBA-CDAD-9BD6-601A37113088}"/>
               </a:ext>
             </a:extLst>
           </p:cNvPr>
           <p:cNvPicPr>
-            <a:picLocks noGrp="1" noRot="1" noChangeAspect="1"/>
+            <a:picLocks noChangeAspect="1"/>
           </p:cNvPicPr>
-          <p:nvPr>
-            <p:ph idx="1"/>
-            <a:videoFile r:link="rId1"/>
-          </p:nvPr>
+          <p:nvPr/>
         </p:nvPicPr>
         <p:blipFill>
-          <a:blip r:embed="rId3"/>
+          <a:blip r:embed="rId2">
+            <a:extLst>
+              <a:ext uri="{28A0092B-C50C-407E-A947-70E740481C1C}">
+                <a14:useLocalDpi xmlns:a14="http://schemas.microsoft.com/office/drawing/2010/main" val="0"/>
+              </a:ext>
+            </a:extLst>
+          </a:blip>
           <a:stretch>
             <a:fillRect/>
           </a:stretch>
         </p:blipFill>
         <p:spPr>
           <a:xfrm>
-            <a:off x="1954213" y="1162715"/>
-            <a:ext cx="8283575" cy="4679950"/>
+            <a:off x="1661624" y="951613"/>
+            <a:ext cx="8868750" cy="4954773"/>
           </a:xfrm>
           <a:prstGeom prst="rect">
             <a:avLst/>
           </a:prstGeom>
         </p:spPr>
       </p:pic>
-      <p:sp>
-        <p:nvSpPr>
-          <p:cNvPr id="4" name="Datumsplatzhalter 3">
-            <a:extLst>
-              <a:ext uri="{FF2B5EF4-FFF2-40B4-BE49-F238E27FC236}">
-                <a16:creationId xmlns:a16="http://schemas.microsoft.com/office/drawing/2014/main" id="{9C3C7FC3-C8E8-6611-DB61-491E8E769643}"/>
-              </a:ext>
-            </a:extLst>
-          </p:cNvPr>
-          <p:cNvSpPr>
-            <a:spLocks noGrp="1"/>
-          </p:cNvSpPr>
-          <p:nvPr>
-            <p:ph type="dt" sz="half" idx="10"/>
-          </p:nvPr>
-        </p:nvSpPr>
-        <p:spPr/>
-        <p:txBody>
-          <a:bodyPr/>
-          <a:lstStyle/>
-          <a:p>
-            <a:fld id="{6861D6AC-3BAC-4A50-9479-1E7CD895A648}" type="datetime1">
-              <a:rPr lang="en-GB" noProof="0" smtClean="0"/>
-              <a:t>25.05.2026</a:t>
-            </a:fld>
-            <a:endParaRPr lang="en-GB" noProof="0" dirty="0"/>
-          </a:p>
-        </p:txBody>
-      </p:sp>
-      <p:sp>
-        <p:nvSpPr>
-          <p:cNvPr id="6" name="Foliennummernplatzhalter 5">
-            <a:extLst>
-              <a:ext uri="{FF2B5EF4-FFF2-40B4-BE49-F238E27FC236}">
-                <a16:creationId xmlns:a16="http://schemas.microsoft.com/office/drawing/2014/main" id="{4CF344AC-A05B-27B7-F466-3BB7C6053150}"/>
-              </a:ext>
-            </a:extLst>
-          </p:cNvPr>
-          <p:cNvSpPr>
-            <a:spLocks noGrp="1"/>
-          </p:cNvSpPr>
-          <p:nvPr>
-            <p:ph type="sldNum" sz="quarter" idx="12"/>
-          </p:nvPr>
-        </p:nvSpPr>
-        <p:spPr/>
-        <p:txBody>
-          <a:bodyPr/>
-          <a:lstStyle/>
-          <a:p>
-            <a:fld id="{5ACA52AF-F19D-405C-AD5F-7D94B96A5CC3}" type="slidenum">
-              <a:rPr lang="en-GB" noProof="0" smtClean="0"/>
-              <a:t>9</a:t>
-            </a:fld>
-            <a:endParaRPr lang="en-GB" noProof="0" dirty="0"/>
-          </a:p>
-        </p:txBody>
-      </p:sp>
-      <p:sp>
-        <p:nvSpPr>
-          <p:cNvPr id="8" name="Textfeld 7">
-            <a:extLst>
-              <a:ext uri="{FF2B5EF4-FFF2-40B4-BE49-F238E27FC236}">
-                <a16:creationId xmlns:a16="http://schemas.microsoft.com/office/drawing/2014/main" id="{03105EE4-336F-BC74-5EEF-A672528549A2}"/>
-              </a:ext>
-            </a:extLst>
-          </p:cNvPr>
-          <p:cNvSpPr txBox="1"/>
-          <p:nvPr/>
-        </p:nvSpPr>
-        <p:spPr>
-          <a:xfrm>
-            <a:off x="1954212" y="5842665"/>
-            <a:ext cx="3104440" cy="369332"/>
-          </a:xfrm>
-          <a:prstGeom prst="rect">
-            <a:avLst/>
-          </a:prstGeom>
-          <a:noFill/>
-        </p:spPr>
-        <p:txBody>
-          <a:bodyPr wrap="none" rtlCol="0">
-            <a:spAutoFit/>
-          </a:bodyPr>
-          <a:lstStyle/>
-          <a:p>
-            <a:r>
-              <a:rPr lang="en-GB" noProof="0" dirty="0"/>
-              <a:t>Source: Ben Katz (YouTube)</a:t>
-            </a:r>
-          </a:p>
-        </p:txBody>
-      </p:sp>
     </p:spTree>
     <p:extLst>
       <p:ext uri="{BB962C8B-B14F-4D97-AF65-F5344CB8AC3E}">
-        <p14:creationId xmlns:p14="http://schemas.microsoft.com/office/powerpoint/2010/main" val="3548576058"/>
+        <p14:creationId xmlns:p14="http://schemas.microsoft.com/office/powerpoint/2010/main" val="76483040"/>
       </p:ext>
     </p:extLst>
   </p:cSld>
   <p:clrMapOvr>
     <a:masterClrMapping/>
   </p:clrMapOvr>
-  <p:timing>
-    <p:tnLst>
-      <p:par>
-        <p:cTn id="1" dur="indefinite" restart="never" nodeType="tmRoot">
-          <p:childTnLst>
-            <p:seq concurrent="1" nextAc="seek">
-              <p:cTn id="2" dur="indefinite" nodeType="mainSeq">
-                <p:childTnLst>
-                  <p:par>
-                    <p:cTn id="3" fill="hold">
-                      <p:stCondLst>
-                        <p:cond delay="indefinite"/>
-                      </p:stCondLst>
-                      <p:childTnLst>
-                        <p:par>
-                          <p:cTn id="4" fill="hold">
-                            <p:stCondLst>
-                              <p:cond delay="0"/>
-                            </p:stCondLst>
-                            <p:childTnLst>
-                              <p:par>
-                                <p:cTn id="5" presetID="1" presetClass="mediacall" presetSubtype="0" fill="hold" nodeType="clickEffect">
-                                  <p:stCondLst>
-                                    <p:cond delay="0"/>
-                                  </p:stCondLst>
-                                  <p:childTnLst>
-                                    <p:cmd type="call" cmd="playFrom(0.0)">
-                                      <p:cBhvr>
-                                        <p:cTn id="6" dur="1" fill="hold"/>
-                                        <p:tgtEl>
-                                          <p:spTgt spid="7"/>
-                                        </p:tgtEl>
-                                      </p:cBhvr>
-                                    </p:cmd>
-                                  </p:childTnLst>
-                                </p:cTn>
-                              </p:par>
-                            </p:childTnLst>
-                          </p:cTn>
-                        </p:par>
-                      </p:childTnLst>
-                    </p:cTn>
-                  </p:par>
-                </p:childTnLst>
-              </p:cTn>
-              <p:prevCondLst>
-                <p:cond evt="onPrev" delay="0">
-                  <p:tgtEl>
-                    <p:sldTgt/>
-                  </p:tgtEl>
-                </p:cond>
-              </p:prevCondLst>
-              <p:nextCondLst>
-                <p:cond evt="onNext" delay="0">
-                  <p:tgtEl>
-                    <p:sldTgt/>
-                  </p:tgtEl>
-                </p:cond>
-              </p:nextCondLst>
-            </p:seq>
-            <p:video>
-              <p:cMediaNode vol="80000">
-                <p:cTn id="7" fill="hold" display="0">
-                  <p:stCondLst>
-                    <p:cond delay="indefinite"/>
-                  </p:stCondLst>
-                </p:cTn>
-                <p:tgtEl>
-                  <p:spTgt spid="7"/>
-                </p:tgtEl>
-              </p:cMediaNode>
-            </p:video>
-            <p:seq concurrent="1" nextAc="seek">
-              <p:cTn id="8" restart="whenNotActive" fill="hold" evtFilter="cancelBubble" nodeType="interactiveSeq">
-                <p:stCondLst>
-                  <p:cond evt="onClick" delay="0">
-                    <p:tgtEl>
-                      <p:spTgt spid="7"/>
-                    </p:tgtEl>
-                  </p:cond>
-                </p:stCondLst>
-                <p:endSync evt="end" delay="0">
-                  <p:rtn val="all"/>
-                </p:endSync>
-                <p:childTnLst>
-                  <p:par>
-                    <p:cTn id="9" fill="hold">
-                      <p:stCondLst>
-                        <p:cond delay="0"/>
-                      </p:stCondLst>
-                      <p:childTnLst>
-                        <p:par>
-                          <p:cTn id="10" fill="hold">
-                            <p:stCondLst>
-                              <p:cond delay="0"/>
-                            </p:stCondLst>
-                            <p:childTnLst>
-                              <p:par>
-                                <p:cTn id="11" presetID="2" presetClass="mediacall" presetSubtype="0" fill="hold" nodeType="clickEffect">
-                                  <p:stCondLst>
-                                    <p:cond delay="0"/>
-                                  </p:stCondLst>
-                                  <p:childTnLst>
-                                    <p:cmd type="call" cmd="togglePause">
-                                      <p:cBhvr>
-                                        <p:cTn id="12" dur="1" fill="hold"/>
-                                        <p:tgtEl>
-                                          <p:spTgt spid="7"/>
-                                        </p:tgtEl>
-                                      </p:cBhvr>
-                                    </p:cmd>
-                                  </p:childTnLst>
-                                </p:cTn>
-                              </p:par>
-                            </p:childTnLst>
-                          </p:cTn>
-                        </p:par>
-                      </p:childTnLst>
-                    </p:cTn>
-                  </p:par>
-                </p:childTnLst>
-              </p:cTn>
-              <p:nextCondLst>
-                <p:cond evt="onClick" delay="0">
-                  <p:tgtEl>
-                    <p:spTgt spid="7"/>
-                  </p:tgtEl>
-                </p:cond>
-              </p:nextCondLst>
-            </p:seq>
-          </p:childTnLst>
-        </p:cTn>
-      </p:par>
-    </p:tnLst>
-  </p:timing>
 </p:sld>
 </file>
 

--- a/presentation/Furuta Pendulum.pptx
+++ b/presentation/Furuta Pendulum.pptx
@@ -236,7 +236,7 @@
           <a:p>
             <a:fld id="{F68ABEA4-9216-4FDF-AAE1-D8632908A8EC}" type="datetimeFigureOut">
               <a:rPr lang="de-CH" smtClean="0"/>
-              <a:t>28.05.2026</a:t>
+              <a:t>29.05.2026</a:t>
             </a:fld>
             <a:endParaRPr lang="de-CH"/>
           </a:p>
@@ -314,7 +314,7 @@
           <a:p>
             <a:fld id="{2B685DCD-866D-47AE-A236-118539F53379}" type="slidenum">
               <a:rPr lang="de-CH" smtClean="0"/>
-              <a:t>‹Nr.›</a:t>
+              <a:t>‹#›</a:t>
             </a:fld>
             <a:endParaRPr lang="de-CH"/>
           </a:p>
@@ -413,7 +413,7 @@
           <a:p>
             <a:fld id="{4B78A90D-FE7E-41AF-B03D-808D82937CB9}" type="datetimeFigureOut">
               <a:rPr lang="de-CH" smtClean="0"/>
-              <a:t>28.05.2026</a:t>
+              <a:t>29.05.2026</a:t>
             </a:fld>
             <a:endParaRPr lang="de-CH"/>
           </a:p>
@@ -572,7 +572,7 @@
           <a:p>
             <a:fld id="{F615DDFD-030C-4D5A-B33E-3A7E7538D2BE}" type="slidenum">
               <a:rPr lang="de-CH" smtClean="0"/>
-              <a:t>‹Nr.›</a:t>
+              <a:t>‹#›</a:t>
             </a:fld>
             <a:endParaRPr lang="de-CH"/>
           </a:p>
@@ -1262,7 +1262,7 @@
           <a:p>
             <a:fld id="{9C26206A-A7FF-4A2F-A4EA-EDA7D9956B8C}" type="datetime1">
               <a:rPr lang="de-CH" noProof="0" smtClean="0"/>
-              <a:t>28.05.2026</a:t>
+              <a:t>29.05.2026</a:t>
             </a:fld>
             <a:endParaRPr lang="de-CH" noProof="0"/>
           </a:p>
@@ -1320,7 +1320,7 @@
           <a:p>
             <a:fld id="{5ACA52AF-F19D-405C-AD5F-7D94B96A5CC3}" type="slidenum">
               <a:rPr lang="de-CH" noProof="0" smtClean="0"/>
-              <a:t>‹Nr.›</a:t>
+              <a:t>‹#›</a:t>
             </a:fld>
             <a:endParaRPr lang="de-CH" noProof="0"/>
           </a:p>
@@ -1457,7 +1457,7 @@
           <a:p>
             <a:fld id="{AE2B7ECC-AD5B-4AE2-A84F-7ABFC0424E38}" type="datetime1">
               <a:rPr lang="de-CH" noProof="0" smtClean="0"/>
-              <a:t>28.05.2026</a:t>
+              <a:t>29.05.2026</a:t>
             </a:fld>
             <a:endParaRPr lang="de-CH" noProof="0"/>
           </a:p>
@@ -1515,7 +1515,7 @@
           <a:p>
             <a:fld id="{5ACA52AF-F19D-405C-AD5F-7D94B96A5CC3}" type="slidenum">
               <a:rPr lang="de-CH" noProof="0" smtClean="0"/>
-              <a:t>‹Nr.›</a:t>
+              <a:t>‹#›</a:t>
             </a:fld>
             <a:endParaRPr lang="de-CH" noProof="0"/>
           </a:p>
@@ -1744,7 +1744,7 @@
           <a:p>
             <a:fld id="{5FA21818-B1F9-4DD3-88F2-43FBC3C9BAF5}" type="datetime1">
               <a:rPr lang="de-CH" noProof="0" smtClean="0"/>
-              <a:t>28.05.2026</a:t>
+              <a:t>29.05.2026</a:t>
             </a:fld>
             <a:endParaRPr lang="de-CH" noProof="0"/>
           </a:p>
@@ -1802,7 +1802,7 @@
           <a:p>
             <a:fld id="{5ACA52AF-F19D-405C-AD5F-7D94B96A5CC3}" type="slidenum">
               <a:rPr lang="de-CH" noProof="0" smtClean="0"/>
-              <a:t>‹Nr.›</a:t>
+              <a:t>‹#›</a:t>
             </a:fld>
             <a:endParaRPr lang="de-CH" noProof="0"/>
           </a:p>
@@ -2042,7 +2042,7 @@
           <a:p>
             <a:fld id="{F570A20D-9FD8-4251-A734-1127FF21ADB2}" type="datetime1">
               <a:rPr lang="de-CH" noProof="0" smtClean="0"/>
-              <a:t>28.05.2026</a:t>
+              <a:t>29.05.2026</a:t>
             </a:fld>
             <a:endParaRPr lang="de-CH" noProof="0"/>
           </a:p>
@@ -2100,7 +2100,7 @@
           <a:p>
             <a:fld id="{5ACA52AF-F19D-405C-AD5F-7D94B96A5CC3}" type="slidenum">
               <a:rPr lang="de-CH" noProof="0" smtClean="0"/>
-              <a:t>‹Nr.›</a:t>
+              <a:t>‹#›</a:t>
             </a:fld>
             <a:endParaRPr lang="de-CH" noProof="0"/>
           </a:p>
@@ -2442,7 +2442,7 @@
           <a:p>
             <a:fld id="{BB5F4EA9-B322-4AC6-9ED4-333F1AAC8416}" type="datetime1">
               <a:rPr lang="de-CH" noProof="0" smtClean="0"/>
-              <a:t>28.05.2026</a:t>
+              <a:t>29.05.2026</a:t>
             </a:fld>
             <a:endParaRPr lang="de-CH" noProof="0"/>
           </a:p>
@@ -2500,7 +2500,7 @@
           <a:p>
             <a:fld id="{5ACA52AF-F19D-405C-AD5F-7D94B96A5CC3}" type="slidenum">
               <a:rPr lang="de-CH" noProof="0" smtClean="0"/>
-              <a:t>‹Nr.›</a:t>
+              <a:t>‹#›</a:t>
             </a:fld>
             <a:endParaRPr lang="de-CH" noProof="0"/>
           </a:p>
@@ -2810,7 +2810,7 @@
           <a:p>
             <a:fld id="{CFD59B2A-9722-4479-8974-FDB801910172}" type="datetime1">
               <a:rPr lang="de-CH" noProof="0" smtClean="0"/>
-              <a:t>28.05.2026</a:t>
+              <a:t>29.05.2026</a:t>
             </a:fld>
             <a:endParaRPr lang="de-CH" noProof="0"/>
           </a:p>
@@ -2868,7 +2868,7 @@
           <a:p>
             <a:fld id="{5ACA52AF-F19D-405C-AD5F-7D94B96A5CC3}" type="slidenum">
               <a:rPr lang="de-CH" noProof="0" smtClean="0"/>
-              <a:t>‹Nr.›</a:t>
+              <a:t>‹#›</a:t>
             </a:fld>
             <a:endParaRPr lang="de-CH" noProof="0"/>
           </a:p>
@@ -4839,7 +4839,7 @@
           <a:p>
             <a:fld id="{6861D6AC-3BAC-4A50-9479-1E7CD895A648}" type="datetime1">
               <a:rPr lang="de-CH" noProof="0" smtClean="0"/>
-              <a:t>28.05.2026</a:t>
+              <a:t>29.05.2026</a:t>
             </a:fld>
             <a:endParaRPr lang="de-CH" noProof="0"/>
           </a:p>
@@ -4902,7 +4902,7 @@
           <a:p>
             <a:fld id="{5ACA52AF-F19D-405C-AD5F-7D94B96A5CC3}" type="slidenum">
               <a:rPr lang="de-CH" noProof="0" smtClean="0"/>
-              <a:t>‹Nr.›</a:t>
+              <a:t>‹#›</a:t>
             </a:fld>
             <a:endParaRPr lang="de-CH" noProof="0"/>
           </a:p>
@@ -5087,7 +5087,7 @@
           <a:p>
             <a:fld id="{360162FC-E8FF-4D52-8F53-8F2A2A3AD348}" type="datetime1">
               <a:rPr lang="de-CH" noProof="0" smtClean="0"/>
-              <a:t>28.05.2026</a:t>
+              <a:t>29.05.2026</a:t>
             </a:fld>
             <a:endParaRPr lang="de-CH" noProof="0"/>
           </a:p>
@@ -5145,7 +5145,7 @@
           <a:p>
             <a:fld id="{5ACA52AF-F19D-405C-AD5F-7D94B96A5CC3}" type="slidenum">
               <a:rPr lang="de-CH" noProof="0" smtClean="0"/>
-              <a:t>‹Nr.›</a:t>
+              <a:t>‹#›</a:t>
             </a:fld>
             <a:endParaRPr lang="de-CH" noProof="0"/>
           </a:p>
@@ -5335,7 +5335,7 @@
           <a:p>
             <a:fld id="{56D5A3C0-7A2F-4A62-9057-882FB8F5659A}" type="datetime1">
               <a:rPr lang="de-CH" noProof="0" smtClean="0"/>
-              <a:t>28.05.2026</a:t>
+              <a:t>29.05.2026</a:t>
             </a:fld>
             <a:endParaRPr lang="de-CH" noProof="0"/>
           </a:p>
@@ -5393,7 +5393,7 @@
           <a:p>
             <a:fld id="{5ACA52AF-F19D-405C-AD5F-7D94B96A5CC3}" type="slidenum">
               <a:rPr lang="de-CH" noProof="0" smtClean="0"/>
-              <a:t>‹Nr.›</a:t>
+              <a:t>‹#›</a:t>
             </a:fld>
             <a:endParaRPr lang="de-CH" noProof="0"/>
           </a:p>
@@ -5611,7 +5611,7 @@
           <a:p>
             <a:fld id="{73923CAD-8964-4A8E-9E9C-0F755B932903}" type="datetime1">
               <a:rPr lang="de-CH" noProof="0" smtClean="0"/>
-              <a:t>28.05.2026</a:t>
+              <a:t>29.05.2026</a:t>
             </a:fld>
             <a:endParaRPr lang="de-CH" noProof="0"/>
           </a:p>
@@ -5686,7 +5686,7 @@
             <a:fld id="{5ACA52AF-F19D-405C-AD5F-7D94B96A5CC3}" type="slidenum">
               <a:rPr lang="de-CH" noProof="0" smtClean="0"/>
               <a:pPr/>
-              <a:t>‹Nr.›</a:t>
+              <a:t>‹#›</a:t>
             </a:fld>
             <a:endParaRPr lang="de-CH" noProof="0"/>
           </a:p>
@@ -7542,7 +7542,7 @@
           <a:p>
             <a:fld id="{269E37AB-EE9C-4565-B2FD-B1FC504BEE2A}" type="datetime1">
               <a:rPr lang="de-CH" noProof="0" smtClean="0"/>
-              <a:t>28.05.2026</a:t>
+              <a:t>29.05.2026</a:t>
             </a:fld>
             <a:endParaRPr lang="de-CH" noProof="0"/>
           </a:p>
@@ -7633,7 +7633,7 @@
             <a:fld id="{5ACA52AF-F19D-405C-AD5F-7D94B96A5CC3}" type="slidenum">
               <a:rPr lang="de-CH" noProof="0" smtClean="0"/>
               <a:pPr/>
-              <a:t>‹Nr.›</a:t>
+              <a:t>‹#›</a:t>
             </a:fld>
             <a:endParaRPr lang="de-CH" noProof="0"/>
           </a:p>
@@ -8256,15 +8256,15 @@
           <a:p>
             <a:r>
               <a:rPr lang="en-GB" dirty="0"/>
-              <a:t>We learned many things.</a:t>
-            </a:r>
-            <a:endParaRPr lang="en-GB" noProof="0" dirty="0"/>
-          </a:p>
-          <a:p>
-            <a:r>
-              <a:rPr lang="en-GB" noProof="0" dirty="0"/>
-              <a:t>We could still install the cables such that full rotations of the motor are possible.</a:t>
-            </a:r>
+              <a:t>We learned a lot </a:t>
+            </a:r>
+            <a:r>
+              <a:rPr lang="en-GB" dirty="0">
+                <a:sym typeface="Wingdings" panose="05000000000000000000" pitchFamily="2" charset="2"/>
+              </a:rPr>
+              <a:t></a:t>
+            </a:r>
+            <a:endParaRPr lang="en-GB" dirty="0"/>
           </a:p>
         </p:txBody>
       </p:sp>
@@ -8291,7 +8291,7 @@
           <a:p>
             <a:fld id="{9C28B327-839C-4A2D-B2E8-7E49B2F41E4B}" type="datetime1">
               <a:rPr lang="en-GB" noProof="0" smtClean="0"/>
-              <a:t>28/05/2026</a:t>
+              <a:t>29/05/2026</a:t>
             </a:fld>
             <a:endParaRPr lang="en-GB" noProof="0" dirty="0"/>
           </a:p>
@@ -8444,7 +8444,7 @@
           <a:p>
             <a:fld id="{6861D6AC-3BAC-4A50-9479-1E7CD895A648}" type="datetime1">
               <a:rPr lang="en-GB" noProof="0" smtClean="0"/>
-              <a:t>28/05/2026</a:t>
+              <a:t>29/05/2026</a:t>
             </a:fld>
             <a:endParaRPr lang="en-GB" noProof="0" dirty="0"/>
           </a:p>
@@ -8782,7 +8782,7 @@
           <a:p>
             <a:fld id="{298B387B-FBD3-42F8-9E31-B45335F65718}" type="datetime1">
               <a:rPr lang="en-GB" noProof="0" smtClean="0"/>
-              <a:t>28/05/2026</a:t>
+              <a:t>29/05/2026</a:t>
             </a:fld>
             <a:endParaRPr lang="en-GB" noProof="0" dirty="0"/>
           </a:p>
@@ -9009,7 +9009,7 @@
           <a:p>
             <a:fld id="{360162FC-E8FF-4D52-8F53-8F2A2A3AD348}" type="datetime1">
               <a:rPr lang="en-GB" noProof="0" smtClean="0"/>
-              <a:t>28/05/2026</a:t>
+              <a:t>29/05/2026</a:t>
             </a:fld>
             <a:endParaRPr lang="en-GB" noProof="0" dirty="0"/>
           </a:p>
@@ -9125,7 +9125,7 @@
           <a:p>
             <a:fld id="{9C26206A-A7FF-4A2F-A4EA-EDA7D9956B8C}" type="datetime1">
               <a:rPr lang="en-GB" noProof="0" smtClean="0"/>
-              <a:t>28/05/2026</a:t>
+              <a:t>29/05/2026</a:t>
             </a:fld>
             <a:endParaRPr lang="en-GB" noProof="0" dirty="0"/>
           </a:p>
@@ -9277,7 +9277,7 @@
           <a:p>
             <a:r>
               <a:rPr lang="en-GB" noProof="0" dirty="0"/>
-              <a:t>SSC: Synchronous Serial Communication (Protocol by Infineon for their TLE5012B magnetic sensor)</a:t>
+              <a:t>SSC: Synchronous Serial Communication (Protocol used by Infineon for their TLE5012B magnetic sensor)</a:t>
             </a:r>
           </a:p>
           <a:p>
@@ -9376,7 +9376,7 @@
           <a:p>
             <a:fld id="{360162FC-E8FF-4D52-8F53-8F2A2A3AD348}" type="datetime1">
               <a:rPr lang="en-GB" noProof="0" smtClean="0"/>
-              <a:t>28/05/2026</a:t>
+              <a:t>29/05/2026</a:t>
             </a:fld>
             <a:endParaRPr lang="en-GB" noProof="0" dirty="0"/>
           </a:p>
@@ -9492,7 +9492,7 @@
           <a:p>
             <a:fld id="{360162FC-E8FF-4D52-8F53-8F2A2A3AD348}" type="datetime1">
               <a:rPr lang="en-GB" noProof="0" smtClean="0"/>
-              <a:t>28/05/2026</a:t>
+              <a:t>29/05/2026</a:t>
             </a:fld>
             <a:endParaRPr lang="en-GB" noProof="0" dirty="0"/>
           </a:p>
@@ -10042,7 +10042,7 @@
           <a:p>
             <a:fld id="{360162FC-E8FF-4D52-8F53-8F2A2A3AD348}" type="datetime1">
               <a:rPr lang="en-GB" noProof="0" smtClean="0"/>
-              <a:t>28/05/2026</a:t>
+              <a:t>29/05/2026</a:t>
             </a:fld>
             <a:endParaRPr lang="en-GB" noProof="0" dirty="0"/>
           </a:p>
@@ -10282,11 +10282,11 @@
             </a:r>
             <a:r>
               <a:rPr lang="de-CH" dirty="0" err="1"/>
-              <a:t>complex</a:t>
+              <a:t>coils</a:t>
             </a:r>
             <a:r>
               <a:rPr lang="de-CH" dirty="0"/>
-              <a:t> high-</a:t>
+              <a:t>’ </a:t>
             </a:r>
             <a:r>
               <a:rPr lang="de-CH" dirty="0" err="1"/>
@@ -10298,7 +10298,7 @@
             </a:r>
             <a:r>
               <a:rPr lang="de-CH" dirty="0" err="1"/>
-              <a:t>coil</a:t>
+              <a:t>signal</a:t>
             </a:r>
             <a:r>
               <a:rPr lang="de-CH" dirty="0"/>
@@ -10306,7 +10306,7 @@
             </a:r>
             <a:r>
               <a:rPr lang="de-CH" dirty="0" err="1"/>
-              <a:t>currents</a:t>
+              <a:t>required</a:t>
             </a:r>
             <a:r>
               <a:rPr lang="de-CH" dirty="0"/>
@@ -10314,7 +10314,7 @@
             </a:r>
             <a:r>
               <a:rPr lang="de-CH" dirty="0" err="1"/>
-              <a:t>required</a:t>
+              <a:t>to</a:t>
             </a:r>
             <a:r>
               <a:rPr lang="de-CH" dirty="0"/>
@@ -10322,7 +10322,7 @@
             </a:r>
             <a:r>
               <a:rPr lang="de-CH" dirty="0" err="1"/>
-              <a:t>to</a:t>
+              <a:t>rotate</a:t>
             </a:r>
             <a:r>
               <a:rPr lang="de-CH" dirty="0"/>
@@ -10330,7 +10330,7 @@
             </a:r>
             <a:r>
               <a:rPr lang="de-CH" dirty="0" err="1"/>
-              <a:t>rotate</a:t>
+              <a:t>the</a:t>
             </a:r>
             <a:r>
               <a:rPr lang="de-CH" dirty="0"/>
@@ -10338,7 +10338,7 @@
             </a:r>
             <a:r>
               <a:rPr lang="de-CH" dirty="0" err="1"/>
-              <a:t>the</a:t>
+              <a:t>stepper</a:t>
             </a:r>
             <a:r>
               <a:rPr lang="de-CH" dirty="0"/>
@@ -10346,7 +10346,21 @@
             </a:r>
             <a:r>
               <a:rPr lang="de-CH" dirty="0" err="1"/>
-              <a:t>stepper</a:t>
+              <a:t>motor</a:t>
+            </a:r>
+            <a:r>
+              <a:rPr lang="de-CH" dirty="0"/>
+              <a:t>.</a:t>
+            </a:r>
+          </a:p>
+          <a:p>
+            <a:r>
+              <a:rPr lang="de-CH" dirty="0"/>
+              <a:t>The FPGA </a:t>
+            </a:r>
+            <a:r>
+              <a:rPr lang="de-CH" dirty="0" err="1"/>
+              <a:t>only</a:t>
             </a:r>
             <a:r>
               <a:rPr lang="de-CH" dirty="0"/>
@@ -10354,21 +10368,7 @@
             </a:r>
             <a:r>
               <a:rPr lang="de-CH" dirty="0" err="1"/>
-              <a:t>motor</a:t>
-            </a:r>
-            <a:r>
-              <a:rPr lang="de-CH" dirty="0"/>
-              <a:t>.</a:t>
-            </a:r>
-          </a:p>
-          <a:p>
-            <a:r>
-              <a:rPr lang="de-CH" dirty="0"/>
-              <a:t>The FPGA </a:t>
-            </a:r>
-            <a:r>
-              <a:rPr lang="de-CH" dirty="0" err="1"/>
-              <a:t>only</a:t>
+              <a:t>needs</a:t>
             </a:r>
             <a:r>
               <a:rPr lang="de-CH" dirty="0"/>
@@ -10376,7 +10376,15 @@
             </a:r>
             <a:r>
               <a:rPr lang="de-CH" dirty="0" err="1"/>
-              <a:t>needs</a:t>
+              <a:t>to</a:t>
+            </a:r>
+            <a:r>
+              <a:rPr lang="de-CH" dirty="0"/>
+              <a:t> send </a:t>
+            </a:r>
+            <a:r>
+              <a:rPr lang="de-CH" dirty="0" err="1"/>
+              <a:t>two</a:t>
             </a:r>
             <a:r>
               <a:rPr lang="de-CH" dirty="0"/>
@@ -10384,15 +10392,23 @@
             </a:r>
             <a:r>
               <a:rPr lang="de-CH" dirty="0" err="1"/>
-              <a:t>to</a:t>
+              <a:t>signals</a:t>
             </a:r>
             <a:r>
               <a:rPr lang="de-CH" dirty="0"/>
-              <a:t> send </a:t>
+              <a:t>: STEP (</a:t>
             </a:r>
             <a:r>
               <a:rPr lang="de-CH" dirty="0" err="1"/>
-              <a:t>two</a:t>
+              <a:t>one</a:t>
+            </a:r>
+            <a:r>
+              <a:rPr lang="de-CH" dirty="0"/>
+              <a:t> pulse = </a:t>
+            </a:r>
+            <a:r>
+              <a:rPr lang="de-CH" dirty="0" err="1"/>
+              <a:t>one</a:t>
             </a:r>
             <a:r>
               <a:rPr lang="de-CH" dirty="0"/>
@@ -10400,23 +10416,33 @@
             </a:r>
             <a:r>
               <a:rPr lang="de-CH" dirty="0" err="1"/>
-              <a:t>signals</a:t>
+              <a:t>step</a:t>
             </a:r>
             <a:r>
               <a:rPr lang="de-CH" dirty="0"/>
-              <a:t>: STEP (</a:t>
+              <a:t>) and DIR (high: CCW, </a:t>
             </a:r>
             <a:r>
               <a:rPr lang="de-CH" dirty="0" err="1"/>
-              <a:t>one</a:t>
+              <a:t>low</a:t>
             </a:r>
             <a:r>
               <a:rPr lang="de-CH" dirty="0"/>
-              <a:t> pulse = </a:t>
-            </a:r>
+              <a:t>: CW)</a:t>
+            </a:r>
+          </a:p>
+          <a:p>
             <a:r>
               <a:rPr lang="de-CH" dirty="0" err="1"/>
-              <a:t>one</a:t>
+              <a:t>We</a:t>
+            </a:r>
+            <a:r>
+              <a:rPr lang="de-CH" dirty="0"/>
+              <a:t> do </a:t>
+            </a:r>
+            <a:r>
+              <a:rPr lang="de-CH" dirty="0" err="1"/>
+              <a:t>this</a:t>
             </a:r>
             <a:r>
               <a:rPr lang="de-CH" dirty="0"/>
@@ -10424,19 +10450,35 @@
             </a:r>
             <a:r>
               <a:rPr lang="de-CH" dirty="0" err="1"/>
-              <a:t>step</a:t>
+              <a:t>by</a:t>
             </a:r>
             <a:r>
               <a:rPr lang="de-CH" dirty="0"/>
-              <a:t>) and DIR (high: CCW, </a:t>
+              <a:t> </a:t>
             </a:r>
             <a:r>
               <a:rPr lang="de-CH" dirty="0" err="1"/>
-              <a:t>low</a:t>
+              <a:t>setting</a:t>
             </a:r>
             <a:r>
               <a:rPr lang="de-CH" dirty="0"/>
-              <a:t>: CW).</a:t>
+              <a:t> </a:t>
+            </a:r>
+            <a:r>
+              <a:rPr lang="de-CH" dirty="0" err="1"/>
+              <a:t>the</a:t>
+            </a:r>
+            <a:r>
+              <a:rPr lang="de-CH" dirty="0"/>
+              <a:t> </a:t>
+            </a:r>
+            <a:r>
+              <a:rPr lang="de-CH" dirty="0" err="1"/>
+              <a:t>frequency</a:t>
+            </a:r>
+            <a:r>
+              <a:rPr lang="de-CH" dirty="0"/>
+              <a:t> of STEPs</a:t>
             </a:r>
           </a:p>
           <a:p>
@@ -10489,54 +10531,8 @@
             </a:r>
             <a:r>
               <a:rPr lang="de-CH" dirty="0"/>
-              <a:t>: 8 – 30 V DC,</a:t>
-            </a:r>
-          </a:p>
-          <a:p>
-            <a:pPr lvl="1"/>
-            <a:r>
-              <a:rPr lang="de-CH" dirty="0" err="1"/>
-              <a:t>Logic</a:t>
-            </a:r>
-            <a:r>
-              <a:rPr lang="de-CH" dirty="0"/>
-              <a:t> </a:t>
-            </a:r>
-            <a:r>
-              <a:rPr lang="de-CH" dirty="0" err="1"/>
-              <a:t>levels</a:t>
-            </a:r>
-            <a:r>
-              <a:rPr lang="de-CH" dirty="0"/>
-              <a:t>: 3.3 V </a:t>
-            </a:r>
-            <a:r>
-              <a:rPr lang="de-CH" dirty="0" err="1"/>
-              <a:t>or</a:t>
-            </a:r>
-            <a:r>
-              <a:rPr lang="de-CH" dirty="0"/>
-              <a:t> 5 V (</a:t>
-            </a:r>
-            <a:r>
-              <a:rPr lang="de-CH" dirty="0" err="1"/>
-              <a:t>jumper</a:t>
-            </a:r>
-            <a:r>
-              <a:rPr lang="de-CH" dirty="0"/>
-              <a:t> </a:t>
-            </a:r>
-            <a:r>
-              <a:rPr lang="de-CH" dirty="0" err="1"/>
-              <a:t>selectable</a:t>
-            </a:r>
-            <a:r>
-              <a:rPr lang="de-CH" dirty="0"/>
-              <a:t>)</a:t>
-            </a:r>
-          </a:p>
-          <a:p>
-            <a:endParaRPr lang="de-CH" dirty="0"/>
+              <a:t>: 24 V DC</a:t>
+            </a:r>
           </a:p>
         </p:txBody>
       </p:sp>
@@ -10563,7 +10559,7 @@
           <a:p>
             <a:fld id="{360162FC-E8FF-4D52-8F53-8F2A2A3AD348}" type="datetime1">
               <a:rPr lang="de-CH" noProof="0" smtClean="0"/>
-              <a:t>28.05.2026</a:t>
+              <a:t>29.05.2026</a:t>
             </a:fld>
             <a:endParaRPr lang="de-CH" noProof="0"/>
           </a:p>
@@ -10651,7 +10647,7 @@
           <a:p>
             <a:r>
               <a:rPr lang="de-CH" dirty="0"/>
-              <a:t>4. Driver Motor</a:t>
+              <a:t>4. Motor Driver</a:t>
             </a:r>
           </a:p>
         </p:txBody>
@@ -10679,7 +10675,7 @@
           <a:p>
             <a:fld id="{360162FC-E8FF-4D52-8F53-8F2A2A3AD348}" type="datetime1">
               <a:rPr lang="de-CH" noProof="0" smtClean="0"/>
-              <a:t>28.05.2026</a:t>
+              <a:t>29.05.2026</a:t>
             </a:fld>
             <a:endParaRPr lang="de-CH" noProof="0"/>
           </a:p>
